--- a/media/sandar/4-amal-JenilOrtoOor.pptx
+++ b/media/sandar/4-amal-JenilOrtoOor.pptx
@@ -10499,7 +10499,7 @@
                 <a:latin typeface="Helvetica" panose="020B0604020202020204" pitchFamily="34" charset="0"/>
                 <a:cs typeface="Helvetica" panose="020B0604020202020204" pitchFamily="34" charset="0"/>
               </a:rPr>
-              <a:t>Баардык учун рахмат айтабыз.</a:t>
+              <a:t>Бардык үчүн рахмат айтабыз.</a:t>
             </a:r>
           </a:p>
           <a:p>
